--- a/deck/codestreet-arbiter-deck.pptx
+++ b/deck/codestreet-arbiter-deck.pptx
@@ -12288,7 +12288,7 @@
                 </a:solidFill>
                 <a:latin typeface="Arial"/>
               </a:rPr>
-              <a:t>Measured Impact</a:t>
+              <a:t>Business Impact</a:t>
             </a:r>
           </a:p>
         </p:txBody>
